--- a/lecture/week_1/week_1_notes_1.pptx
+++ b/lecture/week_1/week_1_notes_1.pptx
@@ -258,7 +258,7 @@
           <a:p>
             <a:fld id="{AC8AFE44-E840-4CA3-A040-6A82550111D5}" type="datetimeFigureOut">
               <a:rPr lang="en-US" smtClean="0"/>
-              <a:t>7/9/24</a:t>
+              <a:t>8/25/26</a:t>
             </a:fld>
             <a:endParaRPr lang="en-US"/>
           </a:p>
@@ -1874,7 +1874,7 @@
           <a:p>
             <a:fld id="{1D8BD707-D9CF-40AE-B4C6-C98DA3205C09}" type="datetimeFigureOut">
               <a:rPr lang="en-US"/>
-              <a:t>7/9/24</a:t>
+              <a:t>8/25/26</a:t>
             </a:fld>
             <a:endParaRPr lang="en-US"/>
           </a:p>
@@ -2051,7 +2051,7 @@
           <a:p>
             <a:fld id="{1D8BD707-D9CF-40AE-B4C6-C98DA3205C09}" type="datetimeFigureOut">
               <a:rPr lang="en-US"/>
-              <a:t>7/9/24</a:t>
+              <a:t>8/25/26</a:t>
             </a:fld>
             <a:endParaRPr lang="en-US"/>
           </a:p>
@@ -2265,7 +2265,7 @@
           <a:p>
             <a:fld id="{1D8BD707-D9CF-40AE-B4C6-C98DA3205C09}" type="datetimeFigureOut">
               <a:rPr lang="en-US"/>
-              <a:t>7/9/24</a:t>
+              <a:t>8/25/26</a:t>
             </a:fld>
             <a:endParaRPr lang="en-US"/>
           </a:p>
@@ -2413,7 +2413,7 @@
           <a:p>
             <a:fld id="{1D8BD707-D9CF-40AE-B4C6-C98DA3205C09}" type="datetimeFigureOut">
               <a:rPr lang="en-US"/>
-              <a:t>7/9/24</a:t>
+              <a:t>8/25/26</a:t>
             </a:fld>
             <a:endParaRPr lang="en-US"/>
           </a:p>
@@ -2692,7 +2692,7 @@
           <a:p>
             <a:fld id="{1D8BD707-D9CF-40AE-B4C6-C98DA3205C09}" type="datetimeFigureOut">
               <a:rPr lang="en-US"/>
-              <a:t>7/9/24</a:t>
+              <a:t>8/25/26</a:t>
             </a:fld>
             <a:endParaRPr lang="en-US"/>
           </a:p>
@@ -2917,7 +2917,7 @@
           <a:p>
             <a:fld id="{1D8BD707-D9CF-40AE-B4C6-C98DA3205C09}" type="datetimeFigureOut">
               <a:rPr lang="en-US"/>
-              <a:t>7/9/24</a:t>
+              <a:t>8/25/26</a:t>
             </a:fld>
             <a:endParaRPr lang="en-US"/>
           </a:p>
@@ -4678,7 +4678,7 @@
         <p:spPr>
           <a:xfrm>
             <a:off x="1587500" y="4025900"/>
-            <a:ext cx="9563100" cy="2534027"/>
+            <a:ext cx="9563100" cy="2885405"/>
           </a:xfrm>
           <a:prstGeom prst="rect">
             <a:avLst/>
@@ -4754,102 +4754,12 @@
               </a:tabLst>
             </a:pPr>
             <a:r>
-              <a:rPr sz="4200" dirty="0">
-                <a:latin typeface="Gill Sans MT"/>
-                <a:cs typeface="Gill Sans MT"/>
-              </a:rPr>
-              <a:t>This	</a:t>
-            </a:r>
-            <a:r>
-              <a:rPr sz="4200" spc="-5" dirty="0">
-                <a:latin typeface="Gill Sans MT"/>
-                <a:cs typeface="Gill Sans MT"/>
-              </a:rPr>
-              <a:t>is	</a:t>
-            </a:r>
-            <a:r>
-              <a:rPr sz="4200" spc="-75" dirty="0">
-                <a:latin typeface="Gill Sans MT"/>
-                <a:cs typeface="Gill Sans MT"/>
-              </a:rPr>
-              <a:t>my	</a:t>
-            </a:r>
-            <a:r>
-              <a:rPr lang="en-US" sz="4200" spc="-5" dirty="0">
-                <a:latin typeface="Gill Sans MT"/>
-                <a:cs typeface="Gill Sans MT"/>
-              </a:rPr>
-              <a:t>fifth</a:t>
-            </a:r>
-            <a:r>
-              <a:rPr sz="4200" spc="-5" dirty="0">
-                <a:latin typeface="Gill Sans MT"/>
-                <a:cs typeface="Gill Sans MT"/>
-              </a:rPr>
-              <a:t> </a:t>
-            </a:r>
-            <a:r>
-              <a:rPr lang="en-US" sz="4200" spc="-5" dirty="0">
-                <a:latin typeface="Gill Sans MT"/>
-                <a:cs typeface="Gill Sans MT"/>
-              </a:rPr>
-              <a:t>year</a:t>
-            </a:r>
-            <a:r>
-              <a:rPr sz="4200" spc="-5" dirty="0">
-                <a:latin typeface="Gill Sans MT"/>
-                <a:cs typeface="Gill Sans MT"/>
-              </a:rPr>
-              <a:t> </a:t>
-            </a:r>
-            <a:r>
-              <a:rPr sz="4200" dirty="0">
-                <a:latin typeface="Gill Sans MT"/>
-                <a:cs typeface="Gill Sans MT"/>
-              </a:rPr>
-              <a:t>at</a:t>
-            </a:r>
-            <a:r>
-              <a:rPr sz="4200" spc="-25" dirty="0">
-                <a:latin typeface="Gill Sans MT"/>
-                <a:cs typeface="Gill Sans MT"/>
-              </a:rPr>
-              <a:t> </a:t>
-            </a:r>
-            <a:r>
-              <a:rPr sz="4200" dirty="0">
-                <a:latin typeface="Gill Sans MT"/>
-                <a:cs typeface="Gill Sans MT"/>
-              </a:rPr>
-              <a:t>CSUN</a:t>
-            </a:r>
-            <a:r>
               <a:rPr lang="en-US" sz="4200" dirty="0">
                 <a:latin typeface="Gill Sans MT"/>
                 <a:cs typeface="Gill Sans MT"/>
               </a:rPr>
-              <a:t>!</a:t>
-            </a:r>
-            <a:endParaRPr sz="4200" dirty="0">
-              <a:latin typeface="Gill Sans MT"/>
-              <a:cs typeface="Gill Sans MT"/>
-            </a:endParaRPr>
-          </a:p>
-          <a:p>
-            <a:pPr marL="50800">
-              <a:lnSpc>
-                <a:spcPct val="100000"/>
-              </a:lnSpc>
-              <a:spcBef>
-                <a:spcPts val="2260"/>
-              </a:spcBef>
-              <a:buSzPct val="170238"/>
-              <a:tabLst>
-                <a:tab pos="622300" algn="l"/>
-                <a:tab pos="4565650" algn="l"/>
-                <a:tab pos="7400925" algn="l"/>
-              </a:tabLst>
-            </a:pPr>
+              <a:t>I’ve completed six years at CSUN and was just promoted to Associate Professor!</a:t>
+            </a:r>
             <a:endParaRPr sz="4200" dirty="0">
               <a:latin typeface="Gill Sans MT"/>
               <a:cs typeface="Gill Sans MT"/>
